--- a/docs/exports/USER_GUIDE.ko.pptx
+++ b/docs/exports/USER_GUIDE.ko.pptx
@@ -19,6 +19,7 @@
     <p:sldId id="267" r:id="rId18"/>
     <p:sldId id="268" r:id="rId19"/>
     <p:sldId id="269" r:id="rId20"/>
+    <p:sldId id="270" r:id="rId21"/>
   </p:sldIdLst>
   <p:sldSz cx="12191695" cy="6858000" type="screen4x3"/>
   <p:notesSz cx="6858000" cy="9144000"/>
@@ -5013,7 +5014,7 @@
                 </a:solidFill>
                 <a:latin typeface="Pretendard"/>
               </a:rPr>
-              <a:t>10 / 14</a:t>
+              <a:t>10 / 15</a:t>
             </a:r>
           </a:p>
         </p:txBody>
@@ -5978,7 +5979,7 @@
                 </a:solidFill>
                 <a:latin typeface="Pretendard"/>
               </a:rPr>
-              <a:t>11 / 14</a:t>
+              <a:t>11 / 15</a:t>
             </a:r>
           </a:p>
         </p:txBody>
@@ -6663,7 +6664,7 @@
                 </a:solidFill>
                 <a:latin typeface="Pretendard"/>
               </a:rPr>
-              <a:t>12 / 14</a:t>
+              <a:t>12 / 15</a:t>
             </a:r>
           </a:p>
         </p:txBody>
@@ -7509,7 +7510,7 @@
                 </a:solidFill>
                 <a:latin typeface="Pretendard"/>
               </a:rPr>
-              <a:t>13 / 14</a:t>
+              <a:t>13 / 15</a:t>
             </a:r>
           </a:p>
         </p:txBody>
@@ -7534,6 +7535,953 @@
       <p:grpSpPr/>
       <p:sp>
         <p:nvSpPr>
+          <p:cNvPr id="2" name="TextBox 1"/>
+          <p:cNvSpPr txBox="1"/>
+          <p:nvPr/>
+        </p:nvSpPr>
+        <p:spPr>
+          <a:xfrm>
+            <a:off x="548640" y="384048"/>
+            <a:ext cx="7315200" cy="274320"/>
+          </a:xfrm>
+          <a:prstGeom prst="rect">
+            <a:avLst/>
+          </a:prstGeom>
+          <a:noFill/>
+        </p:spPr>
+        <p:txBody>
+          <a:bodyPr wrap="square" lIns="0" rIns="0" tIns="0" bIns="0">
+            <a:spAutoFit/>
+          </a:bodyPr>
+          <a:lstStyle/>
+          <a:p>
+            <a:r>
+              <a:rPr sz="1100" b="1" i="0">
+                <a:solidFill>
+                  <a:srgbClr val="F96167"/>
+                </a:solidFill>
+                <a:latin typeface="Pretendard"/>
+              </a:rPr>
+              <a:t>PITCHDECK "HARDWARE NEXT" 매핑</a:t>
+            </a:r>
+          </a:p>
+        </p:txBody>
+      </p:sp>
+      <p:sp>
+        <p:nvSpPr>
+          <p:cNvPr id="3" name="TextBox 2"/>
+          <p:cNvSpPr txBox="1"/>
+          <p:nvPr/>
+        </p:nvSpPr>
+        <p:spPr>
+          <a:xfrm>
+            <a:off x="548640" y="685800"/>
+            <a:ext cx="11064240" cy="914400"/>
+          </a:xfrm>
+          <a:prstGeom prst="rect">
+            <a:avLst/>
+          </a:prstGeom>
+          <a:noFill/>
+        </p:spPr>
+        <p:txBody>
+          <a:bodyPr wrap="square" lIns="0" rIns="0" tIns="0" bIns="0">
+            <a:spAutoFit/>
+          </a:bodyPr>
+          <a:lstStyle/>
+          <a:p>
+            <a:r>
+              <a:rPr sz="3200" b="1" i="0">
+                <a:solidFill>
+                  <a:srgbClr val="1E2761"/>
+                </a:solidFill>
+                <a:latin typeface="Pretendard"/>
+              </a:rPr>
+              <a:t>ContextMemory + aegis doctor</a:t>
+            </a:r>
+          </a:p>
+        </p:txBody>
+      </p:sp>
+      <p:sp>
+        <p:nvSpPr>
+          <p:cNvPr id="4" name="Rectangle 3"/>
+          <p:cNvSpPr/>
+          <p:nvPr/>
+        </p:nvSpPr>
+        <p:spPr>
+          <a:xfrm>
+            <a:off x="548640" y="1417320"/>
+            <a:ext cx="548640" cy="36576"/>
+          </a:xfrm>
+          <a:prstGeom prst="rect">
+            <a:avLst/>
+          </a:prstGeom>
+          <a:solidFill>
+            <a:srgbClr val="F96167"/>
+          </a:solidFill>
+          <a:ln>
+            <a:noFill/>
+          </a:ln>
+        </p:spPr>
+        <p:style>
+          <a:lnRef idx="1">
+            <a:schemeClr val="accent1"/>
+          </a:lnRef>
+          <a:fillRef idx="3">
+            <a:schemeClr val="accent1"/>
+          </a:fillRef>
+          <a:effectRef idx="2">
+            <a:schemeClr val="accent1"/>
+          </a:effectRef>
+          <a:fontRef idx="minor">
+            <a:schemeClr val="lt1"/>
+          </a:fontRef>
+        </p:style>
+        <p:txBody>
+          <a:bodyPr rtlCol="0" anchor="ctr"/>
+          <a:lstStyle/>
+          <a:p>
+            <a:pPr algn="ctr"/>
+          </a:p>
+        </p:txBody>
+      </p:sp>
+      <p:sp>
+        <p:nvSpPr>
+          <p:cNvPr id="5" name="TextBox 4"/>
+          <p:cNvSpPr txBox="1"/>
+          <p:nvPr/>
+        </p:nvSpPr>
+        <p:spPr>
+          <a:xfrm>
+            <a:off x="548640" y="1691640"/>
+            <a:ext cx="11091672" cy="365760"/>
+          </a:xfrm>
+          <a:prstGeom prst="rect">
+            <a:avLst/>
+          </a:prstGeom>
+          <a:noFill/>
+        </p:spPr>
+        <p:txBody>
+          <a:bodyPr wrap="square" lIns="0" rIns="0" tIns="0" bIns="0">
+            <a:spAutoFit/>
+          </a:bodyPr>
+          <a:lstStyle/>
+          <a:p>
+            <a:r>
+              <a:rPr sz="1400" b="0" i="1">
+                <a:solidFill>
+                  <a:srgbClr val="8A90A8"/>
+                </a:solidFill>
+                <a:latin typeface="Pretendard"/>
+              </a:rPr>
+              <a:t>ATV 가 생성될 때마다 자동 저장 — CXL SSD / Computational SSD 의 software emulation</a:t>
+            </a:r>
+          </a:p>
+        </p:txBody>
+      </p:sp>
+      <p:sp>
+        <p:nvSpPr>
+          <p:cNvPr id="6" name="Rounded Rectangle 5"/>
+          <p:cNvSpPr/>
+          <p:nvPr/>
+        </p:nvSpPr>
+        <p:spPr>
+          <a:xfrm>
+            <a:off x="548640" y="2240280"/>
+            <a:ext cx="5532120" cy="2286000"/>
+          </a:xfrm>
+          <a:prstGeom prst="roundRect">
+            <a:avLst>
+              <a:gd name="adj" fmla="val 8000"/>
+            </a:avLst>
+          </a:prstGeom>
+          <a:solidFill>
+            <a:srgbClr val="F6F7FB"/>
+          </a:solidFill>
+          <a:ln>
+            <a:noFill/>
+          </a:ln>
+        </p:spPr>
+        <p:style>
+          <a:lnRef idx="1">
+            <a:schemeClr val="accent1"/>
+          </a:lnRef>
+          <a:fillRef idx="3">
+            <a:schemeClr val="accent1"/>
+          </a:fillRef>
+          <a:effectRef idx="2">
+            <a:schemeClr val="accent1"/>
+          </a:effectRef>
+          <a:fontRef idx="minor">
+            <a:schemeClr val="lt1"/>
+          </a:fontRef>
+        </p:style>
+        <p:txBody>
+          <a:bodyPr rtlCol="0" anchor="ctr"/>
+          <a:lstStyle/>
+          <a:p>
+            <a:pPr algn="ctr"/>
+          </a:p>
+        </p:txBody>
+      </p:sp>
+      <p:sp>
+        <p:nvSpPr>
+          <p:cNvPr id="7" name="TextBox 6"/>
+          <p:cNvSpPr txBox="1"/>
+          <p:nvPr/>
+        </p:nvSpPr>
+        <p:spPr>
+          <a:xfrm>
+            <a:off x="777240" y="2377440"/>
+            <a:ext cx="5074920" cy="365760"/>
+          </a:xfrm>
+          <a:prstGeom prst="rect">
+            <a:avLst/>
+          </a:prstGeom>
+          <a:noFill/>
+        </p:spPr>
+        <p:txBody>
+          <a:bodyPr wrap="square" lIns="0" rIns="0" tIns="0" bIns="0">
+            <a:spAutoFit/>
+          </a:bodyPr>
+          <a:lstStyle/>
+          <a:p>
+            <a:r>
+              <a:rPr sz="1600" b="1" i="0">
+                <a:solidFill>
+                  <a:srgbClr val="1E2761"/>
+                </a:solidFill>
+                <a:latin typeface="Pretendard"/>
+              </a:rPr>
+              <a:t>두 store 의 역할 분리</a:t>
+            </a:r>
+          </a:p>
+        </p:txBody>
+      </p:sp>
+      <p:sp>
+        <p:nvSpPr>
+          <p:cNvPr id="8" name="TextBox 7"/>
+          <p:cNvSpPr txBox="1"/>
+          <p:nvPr/>
+        </p:nvSpPr>
+        <p:spPr>
+          <a:xfrm>
+            <a:off x="777240" y="2788920"/>
+            <a:ext cx="5074920" cy="1737360"/>
+          </a:xfrm>
+          <a:prstGeom prst="rect">
+            <a:avLst/>
+          </a:prstGeom>
+          <a:noFill/>
+        </p:spPr>
+        <p:txBody>
+          <a:bodyPr wrap="square" lIns="0" rIns="0" tIns="0" bIns="0">
+            <a:spAutoFit/>
+          </a:bodyPr>
+          <a:lstStyle/>
+          <a:p>
+            <a:r>
+              <a:rPr sz="1300" b="0" i="0">
+                <a:solidFill>
+                  <a:srgbClr val="1A1E36"/>
+                </a:solidFill>
+                <a:latin typeface="Consolas"/>
+              </a:rPr>
+              <a:t>audit.jsonl
+  SHA3 + Ed25519 체인 (변조 증거)
+context_memory.jsonl  ← 신규
+  분석 fast-path. silicon 이행 시
+  near-storage compute 의 입력</a:t>
+            </a:r>
+          </a:p>
+        </p:txBody>
+      </p:sp>
+      <p:sp>
+        <p:nvSpPr>
+          <p:cNvPr id="9" name="Rounded Rectangle 8"/>
+          <p:cNvSpPr/>
+          <p:nvPr/>
+        </p:nvSpPr>
+        <p:spPr>
+          <a:xfrm>
+            <a:off x="6263640" y="2240280"/>
+            <a:ext cx="5376672" cy="2286000"/>
+          </a:xfrm>
+          <a:prstGeom prst="roundRect">
+            <a:avLst>
+              <a:gd name="adj" fmla="val 8000"/>
+            </a:avLst>
+          </a:prstGeom>
+          <a:solidFill>
+            <a:srgbClr val="F6F7FB"/>
+          </a:solidFill>
+          <a:ln>
+            <a:noFill/>
+          </a:ln>
+        </p:spPr>
+        <p:style>
+          <a:lnRef idx="1">
+            <a:schemeClr val="accent1"/>
+          </a:lnRef>
+          <a:fillRef idx="3">
+            <a:schemeClr val="accent1"/>
+          </a:fillRef>
+          <a:effectRef idx="2">
+            <a:schemeClr val="accent1"/>
+          </a:effectRef>
+          <a:fontRef idx="minor">
+            <a:schemeClr val="lt1"/>
+          </a:fontRef>
+        </p:style>
+        <p:txBody>
+          <a:bodyPr rtlCol="0" anchor="ctr"/>
+          <a:lstStyle/>
+          <a:p>
+            <a:pPr algn="ctr"/>
+          </a:p>
+        </p:txBody>
+      </p:sp>
+      <p:sp>
+        <p:nvSpPr>
+          <p:cNvPr id="10" name="TextBox 9"/>
+          <p:cNvSpPr txBox="1"/>
+          <p:nvPr/>
+        </p:nvSpPr>
+        <p:spPr>
+          <a:xfrm>
+            <a:off x="6492240" y="2377440"/>
+            <a:ext cx="4937760" cy="365760"/>
+          </a:xfrm>
+          <a:prstGeom prst="rect">
+            <a:avLst/>
+          </a:prstGeom>
+          <a:noFill/>
+        </p:spPr>
+        <p:txBody>
+          <a:bodyPr wrap="square" lIns="0" rIns="0" tIns="0" bIns="0">
+            <a:spAutoFit/>
+          </a:bodyPr>
+          <a:lstStyle/>
+          <a:p>
+            <a:r>
+              <a:rPr sz="1400" b="1" i="0">
+                <a:solidFill>
+                  <a:srgbClr val="1E2761"/>
+                </a:solidFill>
+                <a:latin typeface="Consolas"/>
+              </a:rPr>
+              <a:t>$ aegis doctor</a:t>
+            </a:r>
+          </a:p>
+        </p:txBody>
+      </p:sp>
+      <p:sp>
+        <p:nvSpPr>
+          <p:cNvPr id="11" name="TextBox 10"/>
+          <p:cNvSpPr txBox="1"/>
+          <p:nvPr/>
+        </p:nvSpPr>
+        <p:spPr>
+          <a:xfrm>
+            <a:off x="6492240" y="2788920"/>
+            <a:ext cx="4937760" cy="1737360"/>
+          </a:xfrm>
+          <a:prstGeom prst="rect">
+            <a:avLst/>
+          </a:prstGeom>
+          <a:noFill/>
+        </p:spPr>
+        <p:txBody>
+          <a:bodyPr wrap="square" lIns="0" rIns="0" tIns="0" bIns="0">
+            <a:spAutoFit/>
+          </a:bodyPr>
+          <a:lstStyle/>
+          <a:p>
+            <a:r>
+              <a:rPr sz="1200" b="0" i="0">
+                <a:solidFill>
+                  <a:srgbClr val="1A1E36"/>
+                </a:solidFill>
+                <a:latin typeface="Consolas"/>
+              </a:rPr>
+              <a:t>📊 요약 — ALLOW 96.4% / BLOCK 0.5%
+💰 Cost  — $4.18 (94% Claude)
+⚡ Perf  — p95 47ms ✓
+🛡️ Sec  — step310 BLOCK 57%
+→ markdown 리포트 + 휴리스틱 권고</a:t>
+            </a:r>
+          </a:p>
+        </p:txBody>
+      </p:sp>
+      <p:sp>
+        <p:nvSpPr>
+          <p:cNvPr id="12" name="Oval 11"/>
+          <p:cNvSpPr/>
+          <p:nvPr/>
+        </p:nvSpPr>
+        <p:spPr>
+          <a:xfrm>
+            <a:off x="548640" y="4709160"/>
+            <a:ext cx="411480" cy="411480"/>
+          </a:xfrm>
+          <a:prstGeom prst="ellipse">
+            <a:avLst/>
+          </a:prstGeom>
+          <a:solidFill>
+            <a:srgbClr val="F96167"/>
+          </a:solidFill>
+          <a:ln>
+            <a:noFill/>
+          </a:ln>
+        </p:spPr>
+        <p:style>
+          <a:lnRef idx="1">
+            <a:schemeClr val="accent1"/>
+          </a:lnRef>
+          <a:fillRef idx="3">
+            <a:schemeClr val="accent1"/>
+          </a:fillRef>
+          <a:effectRef idx="2">
+            <a:schemeClr val="accent1"/>
+          </a:effectRef>
+          <a:fontRef idx="minor">
+            <a:schemeClr val="lt1"/>
+          </a:fontRef>
+        </p:style>
+        <p:txBody>
+          <a:bodyPr rtlCol="0" anchor="ctr"/>
+          <a:lstStyle/>
+          <a:p>
+            <a:pPr algn="ctr"/>
+          </a:p>
+        </p:txBody>
+      </p:sp>
+      <p:sp>
+        <p:nvSpPr>
+          <p:cNvPr id="13" name="TextBox 12"/>
+          <p:cNvSpPr txBox="1"/>
+          <p:nvPr/>
+        </p:nvSpPr>
+        <p:spPr>
+          <a:xfrm>
+            <a:off x="548640" y="4764024"/>
+            <a:ext cx="411480" cy="365760"/>
+          </a:xfrm>
+          <a:prstGeom prst="rect">
+            <a:avLst/>
+          </a:prstGeom>
+          <a:noFill/>
+        </p:spPr>
+        <p:txBody>
+          <a:bodyPr wrap="square" lIns="0" rIns="0" tIns="0" bIns="0">
+            <a:spAutoFit/>
+          </a:bodyPr>
+          <a:lstStyle/>
+          <a:p>
+            <a:pPr algn="ctr"/>
+            <a:r>
+              <a:rPr sz="1400" b="1" i="0">
+                <a:solidFill>
+                  <a:srgbClr val="FFFFFF"/>
+                </a:solidFill>
+                <a:latin typeface="Pretendard"/>
+              </a:rPr>
+              <a:t>1</a:t>
+            </a:r>
+          </a:p>
+        </p:txBody>
+      </p:sp>
+      <p:sp>
+        <p:nvSpPr>
+          <p:cNvPr id="14" name="TextBox 13"/>
+          <p:cNvSpPr txBox="1"/>
+          <p:nvPr/>
+        </p:nvSpPr>
+        <p:spPr>
+          <a:xfrm>
+            <a:off x="1051560" y="4736592"/>
+            <a:ext cx="3154680" cy="365760"/>
+          </a:xfrm>
+          <a:prstGeom prst="rect">
+            <a:avLst/>
+          </a:prstGeom>
+          <a:noFill/>
+        </p:spPr>
+        <p:txBody>
+          <a:bodyPr wrap="square" lIns="0" rIns="0" tIns="0" bIns="0">
+            <a:spAutoFit/>
+          </a:bodyPr>
+          <a:lstStyle/>
+          <a:p>
+            <a:r>
+              <a:rPr sz="1300" b="1" i="0">
+                <a:solidFill>
+                  <a:srgbClr val="1E2761"/>
+                </a:solidFill>
+                <a:latin typeface="Pretendard"/>
+              </a:rPr>
+              <a:t>매 tool call 자동 기록</a:t>
+            </a:r>
+          </a:p>
+        </p:txBody>
+      </p:sp>
+      <p:sp>
+        <p:nvSpPr>
+          <p:cNvPr id="15" name="TextBox 14"/>
+          <p:cNvSpPr txBox="1"/>
+          <p:nvPr/>
+        </p:nvSpPr>
+        <p:spPr>
+          <a:xfrm>
+            <a:off x="548640" y="5212080"/>
+            <a:ext cx="3611880" cy="822960"/>
+          </a:xfrm>
+          <a:prstGeom prst="rect">
+            <a:avLst/>
+          </a:prstGeom>
+          <a:noFill/>
+        </p:spPr>
+        <p:txBody>
+          <a:bodyPr wrap="square" lIns="0" rIns="0" tIns="0" bIns="0">
+            <a:spAutoFit/>
+          </a:bodyPr>
+          <a:lstStyle/>
+          <a:p>
+            <a:r>
+              <a:rPr sz="1100" b="0" i="0">
+                <a:solidFill>
+                  <a:srgbClr val="1A1E36"/>
+                </a:solidFill>
+                <a:latin typeface="Pretendard"/>
+              </a:rPr>
+              <a:t>ATV 생성 시점에 두 파일 동시 append (defensive)</a:t>
+            </a:r>
+          </a:p>
+        </p:txBody>
+      </p:sp>
+      <p:sp>
+        <p:nvSpPr>
+          <p:cNvPr id="16" name="Oval 15"/>
+          <p:cNvSpPr/>
+          <p:nvPr/>
+        </p:nvSpPr>
+        <p:spPr>
+          <a:xfrm>
+            <a:off x="4306824" y="4709160"/>
+            <a:ext cx="411480" cy="411480"/>
+          </a:xfrm>
+          <a:prstGeom prst="ellipse">
+            <a:avLst/>
+          </a:prstGeom>
+          <a:solidFill>
+            <a:srgbClr val="F96167"/>
+          </a:solidFill>
+          <a:ln>
+            <a:noFill/>
+          </a:ln>
+        </p:spPr>
+        <p:style>
+          <a:lnRef idx="1">
+            <a:schemeClr val="accent1"/>
+          </a:lnRef>
+          <a:fillRef idx="3">
+            <a:schemeClr val="accent1"/>
+          </a:fillRef>
+          <a:effectRef idx="2">
+            <a:schemeClr val="accent1"/>
+          </a:effectRef>
+          <a:fontRef idx="minor">
+            <a:schemeClr val="lt1"/>
+          </a:fontRef>
+        </p:style>
+        <p:txBody>
+          <a:bodyPr rtlCol="0" anchor="ctr"/>
+          <a:lstStyle/>
+          <a:p>
+            <a:pPr algn="ctr"/>
+          </a:p>
+        </p:txBody>
+      </p:sp>
+      <p:sp>
+        <p:nvSpPr>
+          <p:cNvPr id="17" name="TextBox 16"/>
+          <p:cNvSpPr txBox="1"/>
+          <p:nvPr/>
+        </p:nvSpPr>
+        <p:spPr>
+          <a:xfrm>
+            <a:off x="4306824" y="4764024"/>
+            <a:ext cx="411480" cy="365760"/>
+          </a:xfrm>
+          <a:prstGeom prst="rect">
+            <a:avLst/>
+          </a:prstGeom>
+          <a:noFill/>
+        </p:spPr>
+        <p:txBody>
+          <a:bodyPr wrap="square" lIns="0" rIns="0" tIns="0" bIns="0">
+            <a:spAutoFit/>
+          </a:bodyPr>
+          <a:lstStyle/>
+          <a:p>
+            <a:pPr algn="ctr"/>
+            <a:r>
+              <a:rPr sz="1400" b="1" i="0">
+                <a:solidFill>
+                  <a:srgbClr val="FFFFFF"/>
+                </a:solidFill>
+                <a:latin typeface="Pretendard"/>
+              </a:rPr>
+              <a:t>2</a:t>
+            </a:r>
+          </a:p>
+        </p:txBody>
+      </p:sp>
+      <p:sp>
+        <p:nvSpPr>
+          <p:cNvPr id="18" name="TextBox 17"/>
+          <p:cNvSpPr txBox="1"/>
+          <p:nvPr/>
+        </p:nvSpPr>
+        <p:spPr>
+          <a:xfrm>
+            <a:off x="4809744" y="4736592"/>
+            <a:ext cx="3154680" cy="365760"/>
+          </a:xfrm>
+          <a:prstGeom prst="rect">
+            <a:avLst/>
+          </a:prstGeom>
+          <a:noFill/>
+        </p:spPr>
+        <p:txBody>
+          <a:bodyPr wrap="square" lIns="0" rIns="0" tIns="0" bIns="0">
+            <a:spAutoFit/>
+          </a:bodyPr>
+          <a:lstStyle/>
+          <a:p>
+            <a:r>
+              <a:rPr sz="1300" b="1" i="0">
+                <a:solidFill>
+                  <a:srgbClr val="1E2761"/>
+                </a:solidFill>
+                <a:latin typeface="Pretendard"/>
+              </a:rPr>
+              <a:t>3축 분석 + 권고</a:t>
+            </a:r>
+          </a:p>
+        </p:txBody>
+      </p:sp>
+      <p:sp>
+        <p:nvSpPr>
+          <p:cNvPr id="19" name="TextBox 18"/>
+          <p:cNvSpPr txBox="1"/>
+          <p:nvPr/>
+        </p:nvSpPr>
+        <p:spPr>
+          <a:xfrm>
+            <a:off x="4306824" y="5212080"/>
+            <a:ext cx="3611880" cy="822960"/>
+          </a:xfrm>
+          <a:prstGeom prst="rect">
+            <a:avLst/>
+          </a:prstGeom>
+          <a:noFill/>
+        </p:spPr>
+        <p:txBody>
+          <a:bodyPr wrap="square" lIns="0" rIns="0" tIns="0" bIns="0">
+            <a:spAutoFit/>
+          </a:bodyPr>
+          <a:lstStyle/>
+          <a:p>
+            <a:r>
+              <a:rPr sz="1100" b="0" i="0">
+                <a:solidFill>
+                  <a:srgbClr val="1A1E36"/>
+                </a:solidFill>
+                <a:latin typeface="Pretendard"/>
+              </a:rPr>
+              <a:t>Cost · Performance · Security 휴리스틱 advisor 11종 룰</a:t>
+            </a:r>
+          </a:p>
+        </p:txBody>
+      </p:sp>
+      <p:sp>
+        <p:nvSpPr>
+          <p:cNvPr id="20" name="Oval 19"/>
+          <p:cNvSpPr/>
+          <p:nvPr/>
+        </p:nvSpPr>
+        <p:spPr>
+          <a:xfrm>
+            <a:off x="8065008" y="4709160"/>
+            <a:ext cx="411480" cy="411480"/>
+          </a:xfrm>
+          <a:prstGeom prst="ellipse">
+            <a:avLst/>
+          </a:prstGeom>
+          <a:solidFill>
+            <a:srgbClr val="F96167"/>
+          </a:solidFill>
+          <a:ln>
+            <a:noFill/>
+          </a:ln>
+        </p:spPr>
+        <p:style>
+          <a:lnRef idx="1">
+            <a:schemeClr val="accent1"/>
+          </a:lnRef>
+          <a:fillRef idx="3">
+            <a:schemeClr val="accent1"/>
+          </a:fillRef>
+          <a:effectRef idx="2">
+            <a:schemeClr val="accent1"/>
+          </a:effectRef>
+          <a:fontRef idx="minor">
+            <a:schemeClr val="lt1"/>
+          </a:fontRef>
+        </p:style>
+        <p:txBody>
+          <a:bodyPr rtlCol="0" anchor="ctr"/>
+          <a:lstStyle/>
+          <a:p>
+            <a:pPr algn="ctr"/>
+          </a:p>
+        </p:txBody>
+      </p:sp>
+      <p:sp>
+        <p:nvSpPr>
+          <p:cNvPr id="21" name="TextBox 20"/>
+          <p:cNvSpPr txBox="1"/>
+          <p:nvPr/>
+        </p:nvSpPr>
+        <p:spPr>
+          <a:xfrm>
+            <a:off x="8065008" y="4764024"/>
+            <a:ext cx="411480" cy="365760"/>
+          </a:xfrm>
+          <a:prstGeom prst="rect">
+            <a:avLst/>
+          </a:prstGeom>
+          <a:noFill/>
+        </p:spPr>
+        <p:txBody>
+          <a:bodyPr wrap="square" lIns="0" rIns="0" tIns="0" bIns="0">
+            <a:spAutoFit/>
+          </a:bodyPr>
+          <a:lstStyle/>
+          <a:p>
+            <a:pPr algn="ctr"/>
+            <a:r>
+              <a:rPr sz="1400" b="1" i="0">
+                <a:solidFill>
+                  <a:srgbClr val="FFFFFF"/>
+                </a:solidFill>
+                <a:latin typeface="Pretendard"/>
+              </a:rPr>
+              <a:t>3</a:t>
+            </a:r>
+          </a:p>
+        </p:txBody>
+      </p:sp>
+      <p:sp>
+        <p:nvSpPr>
+          <p:cNvPr id="22" name="TextBox 21"/>
+          <p:cNvSpPr txBox="1"/>
+          <p:nvPr/>
+        </p:nvSpPr>
+        <p:spPr>
+          <a:xfrm>
+            <a:off x="8567928" y="4736592"/>
+            <a:ext cx="3154680" cy="365760"/>
+          </a:xfrm>
+          <a:prstGeom prst="rect">
+            <a:avLst/>
+          </a:prstGeom>
+          <a:noFill/>
+        </p:spPr>
+        <p:txBody>
+          <a:bodyPr wrap="square" lIns="0" rIns="0" tIns="0" bIns="0">
+            <a:spAutoFit/>
+          </a:bodyPr>
+          <a:lstStyle/>
+          <a:p>
+            <a:r>
+              <a:rPr sz="1300" b="1" i="0">
+                <a:solidFill>
+                  <a:srgbClr val="1E2761"/>
+                </a:solidFill>
+                <a:latin typeface="Pretendard"/>
+              </a:rPr>
+              <a:t>silicon-ready</a:t>
+            </a:r>
+          </a:p>
+        </p:txBody>
+      </p:sp>
+      <p:sp>
+        <p:nvSpPr>
+          <p:cNvPr id="23" name="TextBox 22"/>
+          <p:cNvSpPr txBox="1"/>
+          <p:nvPr/>
+        </p:nvSpPr>
+        <p:spPr>
+          <a:xfrm>
+            <a:off x="8065008" y="5212080"/>
+            <a:ext cx="3611880" cy="822960"/>
+          </a:xfrm>
+          <a:prstGeom prst="rect">
+            <a:avLst/>
+          </a:prstGeom>
+          <a:noFill/>
+        </p:spPr>
+        <p:txBody>
+          <a:bodyPr wrap="square" lIns="0" rIns="0" tIns="0" bIns="0">
+            <a:spAutoFit/>
+          </a:bodyPr>
+          <a:lstStyle/>
+          <a:p>
+            <a:r>
+              <a:rPr sz="1100" b="0" i="0">
+                <a:solidFill>
+                  <a:srgbClr val="1A1E36"/>
+                </a:solidFill>
+                <a:latin typeface="Pretendard"/>
+              </a:rPr>
+              <a:t>Same schema = CXL/CSD 의 spec. host-Python 이 후일 in-storage 로 이행</a:t>
+            </a:r>
+          </a:p>
+        </p:txBody>
+      </p:sp>
+      <p:sp>
+        <p:nvSpPr>
+          <p:cNvPr id="24" name="Rectangle 23"/>
+          <p:cNvSpPr/>
+          <p:nvPr/>
+        </p:nvSpPr>
+        <p:spPr>
+          <a:xfrm>
+            <a:off x="0" y="6565392"/>
+            <a:ext cx="12191695" cy="292608"/>
+          </a:xfrm>
+          <a:prstGeom prst="rect">
+            <a:avLst/>
+          </a:prstGeom>
+          <a:solidFill>
+            <a:srgbClr val="1E2761"/>
+          </a:solidFill>
+          <a:ln>
+            <a:noFill/>
+          </a:ln>
+        </p:spPr>
+        <p:style>
+          <a:lnRef idx="1">
+            <a:schemeClr val="accent1"/>
+          </a:lnRef>
+          <a:fillRef idx="3">
+            <a:schemeClr val="accent1"/>
+          </a:fillRef>
+          <a:effectRef idx="2">
+            <a:schemeClr val="accent1"/>
+          </a:effectRef>
+          <a:fontRef idx="minor">
+            <a:schemeClr val="lt1"/>
+          </a:fontRef>
+        </p:style>
+        <p:txBody>
+          <a:bodyPr rtlCol="0" anchor="ctr"/>
+          <a:lstStyle/>
+          <a:p>
+            <a:pPr algn="ctr"/>
+          </a:p>
+        </p:txBody>
+      </p:sp>
+      <p:sp>
+        <p:nvSpPr>
+          <p:cNvPr id="25" name="TextBox 24"/>
+          <p:cNvSpPr txBox="1"/>
+          <p:nvPr/>
+        </p:nvSpPr>
+        <p:spPr>
+          <a:xfrm>
+            <a:off x="365760" y="6601968"/>
+            <a:ext cx="5486400" cy="256032"/>
+          </a:xfrm>
+          <a:prstGeom prst="rect">
+            <a:avLst/>
+          </a:prstGeom>
+          <a:noFill/>
+        </p:spPr>
+        <p:txBody>
+          <a:bodyPr wrap="square" lIns="0" rIns="0" tIns="0" bIns="0">
+            <a:spAutoFit/>
+          </a:bodyPr>
+          <a:lstStyle/>
+          <a:p>
+            <a:r>
+              <a:rPr sz="1000" b="0" i="0">
+                <a:solidFill>
+                  <a:srgbClr val="CADCFC"/>
+                </a:solidFill>
+                <a:latin typeface="Pretendard"/>
+              </a:rPr>
+              <a:t>Aegis ATV  사용 설명서</a:t>
+            </a:r>
+          </a:p>
+        </p:txBody>
+      </p:sp>
+      <p:sp>
+        <p:nvSpPr>
+          <p:cNvPr id="26" name="TextBox 25"/>
+          <p:cNvSpPr txBox="1"/>
+          <p:nvPr/>
+        </p:nvSpPr>
+        <p:spPr>
+          <a:xfrm>
+            <a:off x="10972800" y="6601968"/>
+            <a:ext cx="914400" cy="256032"/>
+          </a:xfrm>
+          <a:prstGeom prst="rect">
+            <a:avLst/>
+          </a:prstGeom>
+          <a:noFill/>
+        </p:spPr>
+        <p:txBody>
+          <a:bodyPr wrap="square" lIns="0" rIns="0" tIns="0" bIns="0">
+            <a:spAutoFit/>
+          </a:bodyPr>
+          <a:lstStyle/>
+          <a:p>
+            <a:pPr algn="r"/>
+            <a:r>
+              <a:rPr sz="1000" b="0" i="0">
+                <a:solidFill>
+                  <a:srgbClr val="CADCFC"/>
+                </a:solidFill>
+                <a:latin typeface="Pretendard"/>
+              </a:rPr>
+              <a:t>14 / 15</a:t>
+            </a:r>
+          </a:p>
+        </p:txBody>
+      </p:sp>
+    </p:spTree>
+  </p:cSld>
+  <p:clrMapOvr>
+    <a:masterClrMapping/>
+  </p:clrMapOvr>
+</p:sld>
+</file>
+
+<file path=ppt/slides/slide15.xml><?xml version="1.0" encoding="utf-8"?>
+<p:sld xmlns:a="http://schemas.openxmlformats.org/drawingml/2006/main" xmlns:p="http://schemas.openxmlformats.org/presentationml/2006/main" xmlns:r="http://schemas.openxmlformats.org/officeDocument/2006/relationships">
+  <p:cSld>
+    <p:spTree>
+      <p:nvGrpSpPr>
+        <p:cNvPr id="1" name=""/>
+        <p:cNvGrpSpPr/>
+        <p:nvPr/>
+      </p:nvGrpSpPr>
+      <p:grpSpPr/>
+      <p:sp>
+        <p:nvSpPr>
           <p:cNvPr id="2" name="Rectangle 1"/>
           <p:cNvSpPr/>
           <p:nvPr/>
@@ -8549,7 +9497,7 @@
                 </a:solidFill>
                 <a:latin typeface="Pretendard"/>
               </a:rPr>
-              <a:t>2 / 14</a:t>
+              <a:t>2 / 15</a:t>
             </a:r>
           </a:p>
         </p:txBody>
@@ -9600,7 +10548,7 @@
                 </a:solidFill>
                 <a:latin typeface="Pretendard"/>
               </a:rPr>
-              <a:t>3 / 14</a:t>
+              <a:t>3 / 15</a:t>
             </a:r>
           </a:p>
         </p:txBody>
@@ -10571,7 +11519,7 @@
                 </a:solidFill>
                 <a:latin typeface="Pretendard"/>
               </a:rPr>
-              <a:t>4 / 14</a:t>
+              <a:t>4 / 15</a:t>
             </a:r>
           </a:p>
         </p:txBody>
@@ -11048,7 +11996,7 @@
                 </a:solidFill>
                 <a:latin typeface="Pretendard"/>
               </a:rPr>
-              <a:t>5 / 14</a:t>
+              <a:t>5 / 15</a:t>
             </a:r>
           </a:p>
         </p:txBody>
@@ -11749,7 +12697,7 @@
                 </a:solidFill>
                 <a:latin typeface="Pretendard"/>
               </a:rPr>
-              <a:t>6 / 14</a:t>
+              <a:t>6 / 15</a:t>
             </a:r>
           </a:p>
         </p:txBody>
@@ -12811,7 +13759,7 @@
                 </a:solidFill>
                 <a:latin typeface="Pretendard"/>
               </a:rPr>
-              <a:t>7 / 14</a:t>
+              <a:t>7 / 15</a:t>
             </a:r>
           </a:p>
         </p:txBody>
@@ -13730,7 +14678,7 @@
                 </a:solidFill>
                 <a:latin typeface="Pretendard"/>
               </a:rPr>
-              <a:t>8 / 14</a:t>
+              <a:t>8 / 15</a:t>
             </a:r>
           </a:p>
         </p:txBody>
@@ -15146,7 +16094,7 @@
                 </a:solidFill>
                 <a:latin typeface="Pretendard"/>
               </a:rPr>
-              <a:t>9 / 14</a:t>
+              <a:t>9 / 15</a:t>
             </a:r>
           </a:p>
         </p:txBody>
